--- a/pdf/プラン別機能ガイド.pptx
+++ b/pdf/プラン別機能ガイド.pptx
@@ -4592,7 +4592,7 @@
                 </a:solidFill>
                 <a:latin typeface="Hiragino Kaku Gothic ProN"/>
               </a:rPr>
-              <a:t>業種に合わせた10種類のデザインテンプレートから、お店の雰囲気に合うものをお選びいただけます。全プラン共通です（全16種テンプレートの一部）。</a:t>
+              <a:t>業種に合わせて10種類、構成から作り直した専用デザインです（雑誌型・縦書き型・ランキング型・スナップ型 など）。全プラン共通（全16種テンプレートの一部、美容・整体・教室・企業の4業種は次ページ）。</a:t>
             </a:r>
           </a:p>
         </p:txBody>
@@ -6028,7 +6028,7 @@
                 </a:solidFill>
                 <a:latin typeface="Hiragino Kaku Gothic ProN"/>
               </a:rPr>
-              <a:t>飲食店だけでなく、美容室・整体院・教室・企業の4業種にもテンプレートをご用意しています。ネット予約・口コミAI・月次レポートは美容室／整体院／教室ならスタンダード以上で利用可能です（企業は問い合わせ型のため予約なし）。</a:t>
+              <a:t>美容室・整体院・教室・企業の4業種も、業種ごとに骨格から異なる専用デザインです（ポートフォリオ型・医療導線型・タイムライン型・実績型 など）。飲食10業種と合わせ、全14業種すべてが異なる構成のテンプレートです。ネット予約・口コミAI・月次レポートは美容室／整体院／教室ならスタンダード以上で利用可能です（企業は問い合わせ型のため予約なし）。</a:t>
             </a:r>
           </a:p>
         </p:txBody>
@@ -11682,35 +11682,7 @@
                 </a:solidFill>
                 <a:latin typeface="Hiragino Kaku Gothic ProN"/>
               </a:rPr>
-              <a:t> フリーページ・求人ページ セルフ作成</a:t>
-            </a:r>
-          </a:p>
-          <a:p>
-            <a:pPr>
-              <a:lnSpc>
-                <a:spcPct val="125000"/>
-              </a:lnSpc>
-              <a:spcAft>
-                <a:spcPts val="500"/>
-              </a:spcAft>
-            </a:pPr>
-            <a:r>
-              <a:rPr sz="1080" b="1">
-                <a:solidFill>
-                  <a:srgbClr val="A44823"/>
-                </a:solidFill>
-                <a:latin typeface="Hiragino Kaku Gothic ProN"/>
-              </a:rPr>
-              <a:t>・</a:t>
-            </a:r>
-            <a:r>
-              <a:rPr sz="1080">
-                <a:solidFill>
-                  <a:srgbClr val="23201A"/>
-                </a:solidFill>
-                <a:latin typeface="Hiragino Kaku Gothic ProN"/>
-              </a:rPr>
-              <a:t> セルフ編集 無制限</a:t>
+              <a:t> 既存ページのセルフ編集・お知らせ投稿 無制限</a:t>
             </a:r>
           </a:p>
           <a:p>
@@ -12122,7 +12094,7 @@
                 </a:solidFill>
                 <a:latin typeface="Hiragino Kaku Gothic ProN"/>
               </a:rPr>
-              <a:t> ライトプランの全機能</a:t>
+              <a:t> ライトプランの全機能＋フリーページ・求人ページ</a:t>
             </a:r>
           </a:p>
           <a:p>
@@ -12206,7 +12178,7 @@
                 </a:solidFill>
                 <a:latin typeface="Hiragino Kaku Gothic ProN"/>
               </a:rPr>
-              <a:t> 月次レポート（AI改善提案つき）</a:t>
+              <a:t> 月次レポート</a:t>
             </a:r>
           </a:p>
           <a:p>
@@ -12534,6 +12506,34 @@
                 <a:latin typeface="Hiragino Kaku Gothic ProN"/>
               </a:rPr>
               <a:t> スタンダードプランの全機能</a:t>
+            </a:r>
+          </a:p>
+          <a:p>
+            <a:pPr>
+              <a:lnSpc>
+                <a:spcPct val="125000"/>
+              </a:lnSpc>
+              <a:spcAft>
+                <a:spcPts val="500"/>
+              </a:spcAft>
+            </a:pPr>
+            <a:r>
+              <a:rPr sz="1080" b="1">
+                <a:solidFill>
+                  <a:srgbClr val="A44823"/>
+                </a:solidFill>
+                <a:latin typeface="Hiragino Kaku Gothic ProN"/>
+              </a:rPr>
+              <a:t>・</a:t>
+            </a:r>
+            <a:r>
+              <a:rPr sz="1080">
+                <a:solidFill>
+                  <a:srgbClr val="23201A"/>
+                </a:solidFill>
+                <a:latin typeface="Hiragino Kaku Gothic ProN"/>
+              </a:rPr>
+              <a:t> AI月次改善提案・予約メール自動取込</a:t>
             </a:r>
           </a:p>
           <a:p>
@@ -18840,7 +18840,7 @@
                 </a:solidFill>
                 <a:latin typeface="Hiragino Kaku Gothic ProN"/>
               </a:rPr>
-              <a:t>全プラン共通（無制限）</a:t>
+              <a:t>スタンダード／プレミアム（カスタムは個別相談）</a:t>
             </a:r>
           </a:p>
         </p:txBody>
@@ -18848,6 +18848,45 @@
       <p:sp>
         <p:nvSpPr>
           <p:cNvPr id="14" name="TextBox 13"/>
+          <p:cNvSpPr txBox="1"/>
+          <p:nvPr/>
+        </p:nvSpPr>
+        <p:spPr>
+          <a:xfrm>
+            <a:off x="502920" y="4800600"/>
+            <a:ext cx="11155680" cy="320040"/>
+          </a:xfrm>
+          <a:prstGeom prst="rect">
+            <a:avLst/>
+          </a:prstGeom>
+          <a:noFill/>
+        </p:spPr>
+        <p:txBody>
+          <a:bodyPr wrap="square" anchor="t" lIns="0" rIns="0" tIns="0" bIns="0">
+            <a:spAutoFit/>
+          </a:bodyPr>
+          <a:lstStyle/>
+          <a:p>
+            <a:pPr algn="l">
+              <a:lnSpc>
+                <a:spcPct val="115000"/>
+              </a:lnSpc>
+            </a:pPr>
+            <a:r>
+              <a:rPr sz="950" b="0" i="1">
+                <a:solidFill>
+                  <a:srgbClr val="A44823"/>
+                </a:solidFill>
+                <a:latin typeface="Hiragino Kaku Gothic ProN"/>
+              </a:rPr>
+              <a:t>※ ライトプランは既存ページのセルフ編集・お知らせ投稿のみとなります。</a:t>
+            </a:r>
+          </a:p>
+        </p:txBody>
+      </p:sp>
+      <p:sp>
+        <p:nvSpPr>
+          <p:cNvPr id="15" name="TextBox 14"/>
           <p:cNvSpPr txBox="1"/>
           <p:nvPr/>
         </p:nvSpPr>
@@ -18886,7 +18925,7 @@
       </p:sp>
       <p:sp>
         <p:nvSpPr>
-          <p:cNvPr id="15" name="TextBox 14"/>
+          <p:cNvPr id="16" name="TextBox 15"/>
           <p:cNvSpPr txBox="1"/>
           <p:nvPr/>
         </p:nvSpPr>
@@ -19507,7 +19546,7 @@
                 </a:solidFill>
                 <a:latin typeface="Hiragino Kaku Gothic ProN"/>
               </a:rPr>
-              <a:t>全プラン共通（無制限）</a:t>
+              <a:t>スタンダード／プレミアム（カスタムは個別相談）</a:t>
             </a:r>
           </a:p>
         </p:txBody>
@@ -19515,6 +19554,45 @@
       <p:sp>
         <p:nvSpPr>
           <p:cNvPr id="14" name="TextBox 13"/>
+          <p:cNvSpPr txBox="1"/>
+          <p:nvPr/>
+        </p:nvSpPr>
+        <p:spPr>
+          <a:xfrm>
+            <a:off x="502920" y="4800600"/>
+            <a:ext cx="11155680" cy="320040"/>
+          </a:xfrm>
+          <a:prstGeom prst="rect">
+            <a:avLst/>
+          </a:prstGeom>
+          <a:noFill/>
+        </p:spPr>
+        <p:txBody>
+          <a:bodyPr wrap="square" anchor="t" lIns="0" rIns="0" tIns="0" bIns="0">
+            <a:spAutoFit/>
+          </a:bodyPr>
+          <a:lstStyle/>
+          <a:p>
+            <a:pPr algn="l">
+              <a:lnSpc>
+                <a:spcPct val="115000"/>
+              </a:lnSpc>
+            </a:pPr>
+            <a:r>
+              <a:rPr sz="950" b="0" i="1">
+                <a:solidFill>
+                  <a:srgbClr val="A44823"/>
+                </a:solidFill>
+                <a:latin typeface="Hiragino Kaku Gothic ProN"/>
+              </a:rPr>
+              <a:t>※ ライトプランは既存ページのセルフ編集・お知らせ投稿のみとなります。</a:t>
+            </a:r>
+          </a:p>
+        </p:txBody>
+      </p:sp>
+      <p:sp>
+        <p:nvSpPr>
+          <p:cNvPr id="15" name="TextBox 14"/>
           <p:cNvSpPr txBox="1"/>
           <p:nvPr/>
         </p:nvSpPr>
@@ -19553,7 +19631,7 @@
       </p:sp>
       <p:sp>
         <p:nvSpPr>
-          <p:cNvPr id="15" name="TextBox 14"/>
+          <p:cNvPr id="16" name="TextBox 15"/>
           <p:cNvSpPr txBox="1"/>
           <p:nvPr/>
         </p:nvSpPr>
@@ -21802,7 +21880,7 @@
                 </a:solidFill>
                 <a:latin typeface="Hiragino Kaku Gothic ProN"/>
               </a:rPr>
-              <a:t>スタンダード／プレミアム（カスタムは個別相談）</a:t>
+              <a:t>プレミアム（カスタムは個別相談）</a:t>
             </a:r>
           </a:p>
         </p:txBody>
@@ -21810,6 +21888,45 @@
       <p:sp>
         <p:nvSpPr>
           <p:cNvPr id="14" name="TextBox 13"/>
+          <p:cNvSpPr txBox="1"/>
+          <p:nvPr/>
+        </p:nvSpPr>
+        <p:spPr>
+          <a:xfrm>
+            <a:off x="502920" y="4800600"/>
+            <a:ext cx="11155680" cy="320040"/>
+          </a:xfrm>
+          <a:prstGeom prst="rect">
+            <a:avLst/>
+          </a:prstGeom>
+          <a:noFill/>
+        </p:spPr>
+        <p:txBody>
+          <a:bodyPr wrap="square" anchor="t" lIns="0" rIns="0" tIns="0" bIns="0">
+            <a:spAutoFit/>
+          </a:bodyPr>
+          <a:lstStyle/>
+          <a:p>
+            <a:pPr algn="l">
+              <a:lnSpc>
+                <a:spcPct val="115000"/>
+              </a:lnSpc>
+            </a:pPr>
+            <a:r>
+              <a:rPr sz="950" b="0" i="1">
+                <a:solidFill>
+                  <a:srgbClr val="A44823"/>
+                </a:solidFill>
+                <a:latin typeface="Hiragino Kaku Gothic ProN"/>
+              </a:rPr>
+              <a:t>※ ネット予約自体はスタンダードでもご利用いただけます。予約通知メールの自動取込はプレミアム以上の機能です。</a:t>
+            </a:r>
+          </a:p>
+        </p:txBody>
+      </p:sp>
+      <p:sp>
+        <p:nvSpPr>
+          <p:cNvPr id="15" name="TextBox 14"/>
           <p:cNvSpPr txBox="1"/>
           <p:nvPr/>
         </p:nvSpPr>
@@ -21848,7 +21965,7 @@
       </p:sp>
       <p:sp>
         <p:nvSpPr>
-          <p:cNvPr id="15" name="TextBox 14"/>
+          <p:cNvPr id="16" name="TextBox 15"/>
           <p:cNvSpPr txBox="1"/>
           <p:nvPr/>
         </p:nvSpPr>
@@ -26728,7 +26845,7 @@
         </p:nvSpPr>
         <p:spPr>
           <a:xfrm>
-            <a:off x="502920" y="5623560"/>
+            <a:off x="502920" y="5440680"/>
             <a:ext cx="5029200" cy="566928"/>
           </a:xfrm>
           <a:prstGeom prst="roundRect">
@@ -26774,7 +26891,7 @@
         </p:nvSpPr>
         <p:spPr>
           <a:xfrm>
-            <a:off x="685800" y="5623560"/>
+            <a:off x="685800" y="5440680"/>
             <a:ext cx="1188720" cy="566928"/>
           </a:xfrm>
           <a:prstGeom prst="rect">
@@ -26813,7 +26930,7 @@
         </p:nvSpPr>
         <p:spPr>
           <a:xfrm>
-            <a:off x="1874520" y="5623560"/>
+            <a:off x="1874520" y="5440680"/>
             <a:ext cx="3474720" cy="566928"/>
           </a:xfrm>
           <a:prstGeom prst="rect">
@@ -26839,7 +26956,7 @@
                 </a:solidFill>
                 <a:latin typeface="Hiragino Kaku Gothic ProN"/>
               </a:rPr>
-              <a:t>スタンダード／プレミアム（カスタムは個別相談）</a:t>
+              <a:t>プレミアム（カスタムは個別相談）</a:t>
             </a:r>
           </a:p>
         </p:txBody>
@@ -26847,6 +26964,45 @@
       <p:sp>
         <p:nvSpPr>
           <p:cNvPr id="17" name="TextBox 16"/>
+          <p:cNvSpPr txBox="1"/>
+          <p:nvPr/>
+        </p:nvSpPr>
+        <p:spPr>
+          <a:xfrm>
+            <a:off x="502920" y="6080760"/>
+            <a:ext cx="5029200" cy="320040"/>
+          </a:xfrm>
+          <a:prstGeom prst="rect">
+            <a:avLst/>
+          </a:prstGeom>
+          <a:noFill/>
+        </p:spPr>
+        <p:txBody>
+          <a:bodyPr wrap="square" anchor="t" lIns="0" rIns="0" tIns="0" bIns="0">
+            <a:spAutoFit/>
+          </a:bodyPr>
+          <a:lstStyle/>
+          <a:p>
+            <a:pPr algn="l">
+              <a:lnSpc>
+                <a:spcPct val="115000"/>
+              </a:lnSpc>
+            </a:pPr>
+            <a:r>
+              <a:rPr sz="950" b="0" i="1">
+                <a:solidFill>
+                  <a:srgbClr val="A44823"/>
+                </a:solidFill>
+                <a:latin typeface="Hiragino Kaku Gothic ProN"/>
+              </a:rPr>
+              <a:t>※ 月次レポート自体はスタンダードでもご利用いただけます。AIによる改善提案はプレミアム以上の機能です。</a:t>
+            </a:r>
+          </a:p>
+        </p:txBody>
+      </p:sp>
+      <p:sp>
+        <p:nvSpPr>
+          <p:cNvPr id="18" name="TextBox 17"/>
           <p:cNvSpPr txBox="1"/>
           <p:nvPr/>
         </p:nvSpPr>
@@ -26885,7 +27041,7 @@
       </p:sp>
       <p:sp>
         <p:nvSpPr>
-          <p:cNvPr id="18" name="TextBox 17"/>
+          <p:cNvPr id="19" name="TextBox 18"/>
           <p:cNvSpPr txBox="1"/>
           <p:nvPr/>
         </p:nvSpPr>
@@ -33848,6 +34004,18 @@
                         <a:t>フリーページ作成（季節LP・キャンペーン・記事を追加／削除／公開）</a:t>
                       </a:r>
                     </a:p>
+                    <a:p>
+                      <a:pPr algn="l"/>
+                      <a:r>
+                        <a:rPr sz="830" i="1">
+                          <a:solidFill>
+                            <a:srgbClr val="9C9380"/>
+                          </a:solidFill>
+                          <a:latin typeface="Hiragino Kaku Gothic ProN"/>
+                        </a:rPr>
+                        <a:t>ライトは既存ページのセルフ編集・お知らせ投稿のみ対象</a:t>
+                      </a:r>
+                    </a:p>
                   </a:txBody>
                   <a:tcPr anchor="ctr">
                     <a:solidFill>
@@ -33864,11 +34032,11 @@
                       <a:r>
                         <a:rPr sz="1250" b="1">
                           <a:solidFill>
-                            <a:srgbClr val="1E4B3D"/>
+                            <a:srgbClr val="9C9380"/>
                           </a:solidFill>
                           <a:latin typeface="Hiragino Kaku Gothic ProN"/>
                         </a:rPr>
-                        <a:t>○</a:t>
+                        <a:t>×</a:t>
                       </a:r>
                     </a:p>
                   </a:txBody>
@@ -33933,11 +34101,11 @@
                       <a:r>
                         <a:rPr sz="1250" b="1">
                           <a:solidFill>
-                            <a:srgbClr val="1E4B3D"/>
+                            <a:srgbClr val="A44823"/>
                           </a:solidFill>
                           <a:latin typeface="Hiragino Kaku Gothic ProN"/>
                         </a:rPr>
-                        <a:t>○</a:t>
+                        <a:t>△</a:t>
                       </a:r>
                     </a:p>
                   </a:txBody>
@@ -33963,6 +34131,41 @@
                           <a:latin typeface="Hiragino Kaku Gothic ProN"/>
                         </a:rPr>
                         <a:t>求人・採用ページ セルフ作成（職種一覧）</a:t>
+                      </a:r>
+                    </a:p>
+                    <a:p>
+                      <a:pPr algn="l"/>
+                      <a:r>
+                        <a:rPr sz="830" i="1">
+                          <a:solidFill>
+                            <a:srgbClr val="9C9380"/>
+                          </a:solidFill>
+                          <a:latin typeface="Hiragino Kaku Gothic ProN"/>
+                        </a:rPr>
+                        <a:t>ライトは既存ページのセルフ編集・お知らせ投稿のみ対象</a:t>
+                      </a:r>
+                    </a:p>
+                  </a:txBody>
+                  <a:tcPr anchor="ctr">
+                    <a:solidFill>
+                      <a:srgbClr val="FBF6EA"/>
+                    </a:solidFill>
+                  </a:tcPr>
+                </a:tc>
+                <a:tc>
+                  <a:txBody>
+                    <a:bodyPr/>
+                    <a:lstStyle/>
+                    <a:p>
+                      <a:pPr algn="ctr"/>
+                      <a:r>
+                        <a:rPr sz="1250" b="1">
+                          <a:solidFill>
+                            <a:srgbClr val="9C9380"/>
+                          </a:solidFill>
+                          <a:latin typeface="Hiragino Kaku Gothic ProN"/>
+                        </a:rPr>
+                        <a:t>×</a:t>
                       </a:r>
                     </a:p>
                   </a:txBody>
@@ -34027,34 +34230,11 @@
                       <a:r>
                         <a:rPr sz="1250" b="1">
                           <a:solidFill>
-                            <a:srgbClr val="1E4B3D"/>
+                            <a:srgbClr val="A44823"/>
                           </a:solidFill>
                           <a:latin typeface="Hiragino Kaku Gothic ProN"/>
                         </a:rPr>
-                        <a:t>○</a:t>
-                      </a:r>
-                    </a:p>
-                  </a:txBody>
-                  <a:tcPr anchor="ctr">
-                    <a:solidFill>
-                      <a:srgbClr val="FBF6EA"/>
-                    </a:solidFill>
-                  </a:tcPr>
-                </a:tc>
-                <a:tc>
-                  <a:txBody>
-                    <a:bodyPr/>
-                    <a:lstStyle/>
-                    <a:p>
-                      <a:pPr algn="ctr"/>
-                      <a:r>
-                        <a:rPr sz="1250" b="1">
-                          <a:solidFill>
-                            <a:srgbClr val="1E4B3D"/>
-                          </a:solidFill>
-                          <a:latin typeface="Hiragino Kaku Gothic ProN"/>
-                        </a:rPr>
-                        <a:t>○</a:t>
+                        <a:t>△</a:t>
                       </a:r>
                     </a:p>
                   </a:txBody>
@@ -34820,6 +35000,18 @@
                         <a:t>食べログ／ホットペッパー等の予約通知メール自動取込</a:t>
                       </a:r>
                     </a:p>
+                    <a:p>
+                      <a:pPr algn="l"/>
+                      <a:r>
+                        <a:rPr sz="830" i="1">
+                          <a:solidFill>
+                            <a:srgbClr val="9C9380"/>
+                          </a:solidFill>
+                          <a:latin typeface="Hiragino Kaku Gothic ProN"/>
+                        </a:rPr>
+                        <a:t>ネット予約自体はスタンダード以上で利用可。自動取込はプレミアム以上</a:t>
+                      </a:r>
+                    </a:p>
                   </a:txBody>
                   <a:tcPr anchor="ctr">
                     <a:solidFill>
@@ -34859,11 +35051,11 @@
                       <a:r>
                         <a:rPr sz="1250" b="1">
                           <a:solidFill>
-                            <a:srgbClr val="1E4B3D"/>
+                            <a:srgbClr val="9C9380"/>
                           </a:solidFill>
                           <a:latin typeface="Hiragino Kaku Gothic ProN"/>
                         </a:rPr>
-                        <a:t>○</a:t>
+                        <a:t>×</a:t>
                       </a:r>
                     </a:p>
                   </a:txBody>
@@ -36785,7 +36977,7 @@
                           </a:solidFill>
                           <a:latin typeface="Hiragino Kaku Gothic ProN"/>
                         </a:rPr>
-                        <a:t>アクセス・予約・口コミの実データをもとにAIが自動生成</a:t>
+                        <a:t>月次レポート自体はスタンダード以上。AI改善提案はプレミアム以上の機能</a:t>
                       </a:r>
                     </a:p>
                   </a:txBody>
@@ -36827,11 +37019,11 @@
                       <a:r>
                         <a:rPr sz="1250" b="1">
                           <a:solidFill>
-                            <a:srgbClr val="1E4B3D"/>
+                            <a:srgbClr val="9C9380"/>
                           </a:solidFill>
                           <a:latin typeface="Hiragino Kaku Gothic ProN"/>
                         </a:rPr>
-                        <a:t>○</a:t>
+                        <a:t>×</a:t>
                       </a:r>
                     </a:p>
                   </a:txBody>
